--- a/docs/talk/deck/what_it_takes_to_survive.pptx
+++ b/docs/talk/deck/what_it_takes_to_survive.pptx
@@ -573,364 +573,364 @@
                 <c:formatCode>General</c:formatCode>
                 <c:ptCount val="120"/>
                 <c:pt idx="0">
-                  <c:v>4360</c:v>
+                  <c:v>4158</c:v>
                 </c:pt>
                 <c:pt idx="1">
-                  <c:v>7017</c:v>
+                  <c:v>6855</c:v>
                 </c:pt>
                 <c:pt idx="2">
-                  <c:v>8645</c:v>
+                  <c:v>8796</c:v>
                 </c:pt>
                 <c:pt idx="3">
-                  <c:v>10552</c:v>
+                  <c:v>8948</c:v>
                 </c:pt>
                 <c:pt idx="4">
-                  <c:v>12042</c:v>
+                  <c:v>10894</c:v>
                 </c:pt>
                 <c:pt idx="5">
-                  <c:v>13510</c:v>
+                  <c:v>20209</c:v>
                 </c:pt>
                 <c:pt idx="6">
-                  <c:v>14949</c:v>
+                  <c:v>21711</c:v>
                 </c:pt>
                 <c:pt idx="7">
-                  <c:v>16344</c:v>
+                  <c:v>22682</c:v>
                 </c:pt>
                 <c:pt idx="8">
-                  <c:v>17731</c:v>
+                  <c:v>23658</c:v>
                 </c:pt>
                 <c:pt idx="9">
-                  <c:v>19088</c:v>
+                  <c:v>24794</c:v>
                 </c:pt>
                 <c:pt idx="10">
-                  <c:v>20444</c:v>
+                  <c:v>25359</c:v>
                 </c:pt>
                 <c:pt idx="11">
-                  <c:v>21755</c:v>
+                  <c:v>26861</c:v>
                 </c:pt>
                 <c:pt idx="12">
-                  <c:v>23050</c:v>
+                  <c:v>28381</c:v>
                 </c:pt>
                 <c:pt idx="13">
-                  <c:v>24195</c:v>
+                  <c:v>29310</c:v>
                 </c:pt>
                 <c:pt idx="14">
-                  <c:v>25410</c:v>
+                  <c:v>30264</c:v>
                 </c:pt>
                 <c:pt idx="15">
-                  <c:v>26704</c:v>
+                  <c:v>31591</c:v>
                 </c:pt>
                 <c:pt idx="16">
-                  <c:v>28017</c:v>
+                  <c:v>32739</c:v>
                 </c:pt>
                 <c:pt idx="17">
-                  <c:v>29311</c:v>
+                  <c:v>34266</c:v>
                 </c:pt>
                 <c:pt idx="18">
-                  <c:v>30596</c:v>
+                  <c:v>35395</c:v>
                 </c:pt>
                 <c:pt idx="19">
-                  <c:v>31882</c:v>
+                  <c:v>36702</c:v>
                 </c:pt>
                 <c:pt idx="20">
-                  <c:v>33152</c:v>
+                  <c:v>38205</c:v>
                 </c:pt>
                 <c:pt idx="21">
-                  <c:v>34403</c:v>
+                  <c:v>39672</c:v>
                 </c:pt>
                 <c:pt idx="22">
-                  <c:v>35648</c:v>
+                  <c:v>40940</c:v>
                 </c:pt>
                 <c:pt idx="23">
-                  <c:v>36895</c:v>
+                  <c:v>42211</c:v>
                 </c:pt>
                 <c:pt idx="24">
-                  <c:v>38140</c:v>
+                  <c:v>43651</c:v>
                 </c:pt>
                 <c:pt idx="25">
-                  <c:v>39401</c:v>
+                  <c:v>45128</c:v>
                 </c:pt>
                 <c:pt idx="26">
-                  <c:v>40658</c:v>
+                  <c:v>46394</c:v>
                 </c:pt>
                 <c:pt idx="27">
-                  <c:v>41908</c:v>
+                  <c:v>47702</c:v>
                 </c:pt>
                 <c:pt idx="28">
-                  <c:v>43163</c:v>
+                  <c:v>49204</c:v>
                 </c:pt>
                 <c:pt idx="29">
-                  <c:v>44411</c:v>
+                  <c:v>50816</c:v>
                 </c:pt>
                 <c:pt idx="30">
-                  <c:v>45658</c:v>
+                  <c:v>52216</c:v>
                 </c:pt>
                 <c:pt idx="31">
-                  <c:v>46914</c:v>
+                  <c:v>53907</c:v>
                 </c:pt>
                 <c:pt idx="32">
-                  <c:v>48168</c:v>
+                  <c:v>55567</c:v>
                 </c:pt>
                 <c:pt idx="33">
-                  <c:v>49427</c:v>
+                  <c:v>57219</c:v>
                 </c:pt>
                 <c:pt idx="34">
-                  <c:v>50680</c:v>
+                  <c:v>58392</c:v>
                 </c:pt>
                 <c:pt idx="35">
-                  <c:v>51936</c:v>
+                  <c:v>59643</c:v>
                 </c:pt>
                 <c:pt idx="36">
-                  <c:v>53195</c:v>
+                  <c:v>61263</c:v>
                 </c:pt>
                 <c:pt idx="37">
-                  <c:v>54453</c:v>
+                  <c:v>62447</c:v>
                 </c:pt>
                 <c:pt idx="38">
-                  <c:v>55711</c:v>
+                  <c:v>64144</c:v>
                 </c:pt>
                 <c:pt idx="39">
-                  <c:v>56973</c:v>
+                  <c:v>65651</c:v>
                 </c:pt>
                 <c:pt idx="40">
-                  <c:v>58227</c:v>
+                  <c:v>67315</c:v>
                 </c:pt>
                 <c:pt idx="41">
-                  <c:v>59491</c:v>
+                  <c:v>68503</c:v>
                 </c:pt>
                 <c:pt idx="42">
-                  <c:v>60752</c:v>
+                  <c:v>70017</c:v>
                 </c:pt>
                 <c:pt idx="43">
-                  <c:v>62014</c:v>
+                  <c:v>71319</c:v>
                 </c:pt>
                 <c:pt idx="44">
-                  <c:v>63284</c:v>
+                  <c:v>72877</c:v>
                 </c:pt>
                 <c:pt idx="45">
-                  <c:v>64554</c:v>
+                  <c:v>74110</c:v>
                 </c:pt>
                 <c:pt idx="46">
-                  <c:v>65819</c:v>
+                  <c:v>75519</c:v>
                 </c:pt>
                 <c:pt idx="47">
-                  <c:v>67086</c:v>
+                  <c:v>77032</c:v>
                 </c:pt>
                 <c:pt idx="48">
-                  <c:v>68365</c:v>
+                  <c:v>78667</c:v>
                 </c:pt>
                 <c:pt idx="49">
-                  <c:v>69648</c:v>
+                  <c:v>80208</c:v>
                 </c:pt>
                 <c:pt idx="50">
-                  <c:v>70928</c:v>
+                  <c:v>81983</c:v>
                 </c:pt>
                 <c:pt idx="51">
-                  <c:v>72211</c:v>
+                  <c:v>83820</c:v>
                 </c:pt>
                 <c:pt idx="52">
-                  <c:v>73500</c:v>
+                  <c:v>85580</c:v>
                 </c:pt>
                 <c:pt idx="53">
-                  <c:v>74803</c:v>
+                  <c:v>86882</c:v>
                 </c:pt>
                 <c:pt idx="54">
-                  <c:v>76107</c:v>
+                  <c:v>88521</c:v>
                 </c:pt>
                 <c:pt idx="55">
-                  <c:v>77433</c:v>
+                  <c:v>89966</c:v>
                 </c:pt>
                 <c:pt idx="56">
-                  <c:v>78764</c:v>
+                  <c:v>91633</c:v>
                 </c:pt>
                 <c:pt idx="57">
-                  <c:v>80099</c:v>
+                  <c:v>92936</c:v>
                 </c:pt>
                 <c:pt idx="58">
-                  <c:v>81448</c:v>
+                  <c:v>94768</c:v>
                 </c:pt>
                 <c:pt idx="59">
-                  <c:v>82802</c:v>
+                  <c:v>96193</c:v>
                 </c:pt>
                 <c:pt idx="60">
-                  <c:v>84165</c:v>
+                  <c:v>97884</c:v>
                 </c:pt>
                 <c:pt idx="61">
-                  <c:v>85542</c:v>
+                  <c:v>99196</c:v>
                 </c:pt>
                 <c:pt idx="62">
-                  <c:v>86922</c:v>
+                  <c:v>100849</c:v>
                 </c:pt>
                 <c:pt idx="63">
-                  <c:v>88311</c:v>
+                  <c:v>102306</c:v>
                 </c:pt>
                 <c:pt idx="64">
-                  <c:v>89727</c:v>
+                  <c:v>103965</c:v>
                 </c:pt>
                 <c:pt idx="65">
-                  <c:v>91150</c:v>
+                  <c:v>105658</c:v>
                 </c:pt>
                 <c:pt idx="66">
-                  <c:v>92580</c:v>
+                  <c:v>106751</c:v>
                 </c:pt>
                 <c:pt idx="67">
-                  <c:v>94014</c:v>
+                  <c:v>108657</c:v>
                 </c:pt>
                 <c:pt idx="68">
-                  <c:v>95461</c:v>
+                  <c:v>109886</c:v>
                 </c:pt>
                 <c:pt idx="69">
-                  <c:v>96912</c:v>
+                  <c:v>111312</c:v>
                 </c:pt>
                 <c:pt idx="70">
-                  <c:v>98368</c:v>
+                  <c:v>113069</c:v>
                 </c:pt>
                 <c:pt idx="71">
-                  <c:v>99845</c:v>
+                  <c:v>114581</c:v>
                 </c:pt>
                 <c:pt idx="72">
-                  <c:v>101344</c:v>
+                  <c:v>115919</c:v>
                 </c:pt>
                 <c:pt idx="73">
-                  <c:v>102878</c:v>
+                  <c:v>117667</c:v>
                 </c:pt>
                 <c:pt idx="74">
-                  <c:v>104457</c:v>
+                  <c:v>118914</c:v>
                 </c:pt>
                 <c:pt idx="75">
-                  <c:v>106066</c:v>
+                  <c:v>120695</c:v>
                 </c:pt>
                 <c:pt idx="76">
-                  <c:v>107700</c:v>
+                  <c:v>122129</c:v>
                 </c:pt>
                 <c:pt idx="77">
-                  <c:v>109349</c:v>
+                  <c:v>123872</c:v>
                 </c:pt>
                 <c:pt idx="78">
-                  <c:v>111031</c:v>
+                  <c:v>125750</c:v>
                 </c:pt>
                 <c:pt idx="79">
-                  <c:v>112750</c:v>
+                  <c:v>127359</c:v>
                 </c:pt>
                 <c:pt idx="80">
-                  <c:v>114479</c:v>
+                  <c:v>128717</c:v>
                 </c:pt>
                 <c:pt idx="81">
-                  <c:v>116213</c:v>
+                  <c:v>130310</c:v>
                 </c:pt>
                 <c:pt idx="82">
-                  <c:v>117962</c:v>
+                  <c:v>132241</c:v>
                 </c:pt>
                 <c:pt idx="83">
-                  <c:v>119721</c:v>
+                  <c:v>134106</c:v>
                 </c:pt>
                 <c:pt idx="84">
-                  <c:v>121481</c:v>
+                  <c:v>135906</c:v>
                 </c:pt>
                 <c:pt idx="85">
-                  <c:v>123259</c:v>
+                  <c:v>137712</c:v>
                 </c:pt>
                 <c:pt idx="86">
-                  <c:v>125058</c:v>
+                  <c:v>139289</c:v>
                 </c:pt>
                 <c:pt idx="87">
-                  <c:v>126855</c:v>
+                  <c:v>141048</c:v>
                 </c:pt>
                 <c:pt idx="88">
-                  <c:v>128682</c:v>
+                  <c:v>142941</c:v>
                 </c:pt>
                 <c:pt idx="89">
-                  <c:v>130520</c:v>
+                  <c:v>144897</c:v>
                 </c:pt>
                 <c:pt idx="90">
-                  <c:v>132369</c:v>
+                  <c:v>146374</c:v>
                 </c:pt>
                 <c:pt idx="91">
-                  <c:v>134237</c:v>
+                  <c:v>148488</c:v>
                 </c:pt>
                 <c:pt idx="92">
-                  <c:v>136098</c:v>
+                  <c:v>150273</c:v>
                 </c:pt>
                 <c:pt idx="93">
-                  <c:v>137977</c:v>
+                  <c:v>151625</c:v>
                 </c:pt>
                 <c:pt idx="94">
-                  <c:v>139866</c:v>
+                  <c:v>153553</c:v>
                 </c:pt>
                 <c:pt idx="95">
-                  <c:v>141779</c:v>
+                  <c:v>155464</c:v>
                 </c:pt>
                 <c:pt idx="96">
-                  <c:v>143695</c:v>
+                  <c:v>157077</c:v>
                 </c:pt>
                 <c:pt idx="97">
-                  <c:v>145623</c:v>
+                  <c:v>159055</c:v>
                 </c:pt>
                 <c:pt idx="98">
-                  <c:v>147560</c:v>
+                  <c:v>160870</c:v>
                 </c:pt>
                 <c:pt idx="99">
-                  <c:v>149499</c:v>
+                  <c:v>162649</c:v>
                 </c:pt>
                 <c:pt idx="100">
-                  <c:v>151463</c:v>
+                  <c:v>164325</c:v>
                 </c:pt>
                 <c:pt idx="101">
-                  <c:v>153441</c:v>
+                  <c:v>165987</c:v>
                 </c:pt>
                 <c:pt idx="102">
-                  <c:v>155427</c:v>
+                  <c:v>167762</c:v>
                 </c:pt>
                 <c:pt idx="103">
-                  <c:v>157425</c:v>
+                  <c:v>169467</c:v>
                 </c:pt>
                 <c:pt idx="104">
-                  <c:v>159433</c:v>
+                  <c:v>171366</c:v>
                 </c:pt>
                 <c:pt idx="105">
-                  <c:v>161465</c:v>
+                  <c:v>173296</c:v>
                 </c:pt>
                 <c:pt idx="106">
-                  <c:v>163499</c:v>
+                  <c:v>175168</c:v>
                 </c:pt>
                 <c:pt idx="107">
-                  <c:v>165560</c:v>
+                  <c:v>176778</c:v>
                 </c:pt>
                 <c:pt idx="108">
-                  <c:v>167642</c:v>
+                  <c:v>178865</c:v>
                 </c:pt>
                 <c:pt idx="109">
-                  <c:v>169718</c:v>
+                  <c:v>180873</c:v>
                 </c:pt>
                 <c:pt idx="110">
-                  <c:v>171812</c:v>
+                  <c:v>182735</c:v>
                 </c:pt>
                 <c:pt idx="111">
-                  <c:v>173910</c:v>
+                  <c:v>184635</c:v>
                 </c:pt>
                 <c:pt idx="112">
-                  <c:v>176028</c:v>
+                  <c:v>186597</c:v>
                 </c:pt>
                 <c:pt idx="113">
-                  <c:v>178169</c:v>
+                  <c:v>188563</c:v>
                 </c:pt>
                 <c:pt idx="114">
-                  <c:v>180323</c:v>
+                  <c:v>190653</c:v>
                 </c:pt>
                 <c:pt idx="115">
-                  <c:v>182489</c:v>
+                  <c:v>192641</c:v>
                 </c:pt>
                 <c:pt idx="116">
-                  <c:v>184672</c:v>
+                  <c:v>194152</c:v>
                 </c:pt>
                 <c:pt idx="117">
-                  <c:v>186867</c:v>
+                  <c:v>196066</c:v>
                 </c:pt>
                 <c:pt idx="118">
-                  <c:v>189086</c:v>
+                  <c:v>198037</c:v>
                 </c:pt>
                 <c:pt idx="119">
-                  <c:v>191324</c:v>
+                  <c:v>199991</c:v>
                 </c:pt>
               </c:numCache>
             </c:numRef>
@@ -1383,136 +1383,136 @@
                 <c:formatCode>General</c:formatCode>
                 <c:ptCount val="120"/>
                 <c:pt idx="0">
-                  <c:v>561</c:v>
+                  <c:v>1806</c:v>
                 </c:pt>
                 <c:pt idx="1">
-                  <c:v>1030</c:v>
+                  <c:v>3395</c:v>
                 </c:pt>
                 <c:pt idx="2">
-                  <c:v>1449</c:v>
+                  <c:v>4718</c:v>
                 </c:pt>
                 <c:pt idx="3">
-                  <c:v>1838</c:v>
+                  <c:v>4790</c:v>
                 </c:pt>
                 <c:pt idx="4">
-                  <c:v>2187</c:v>
+                  <c:v>4836</c:v>
                 </c:pt>
                 <c:pt idx="5">
-                  <c:v>2501</c:v>
+                  <c:v>4837</c:v>
                 </c:pt>
                 <c:pt idx="6">
-                  <c:v>2781</c:v>
+                  <c:v>4832</c:v>
                 </c:pt>
                 <c:pt idx="7">
-                  <c:v>3030</c:v>
+                  <c:v>4759</c:v>
                 </c:pt>
                 <c:pt idx="8">
-                  <c:v>3250</c:v>
+                  <c:v>4651</c:v>
                 </c:pt>
                 <c:pt idx="9">
-                  <c:v>3442</c:v>
+                  <c:v>4511</c:v>
                 </c:pt>
                 <c:pt idx="10">
-                  <c:v>3609</c:v>
+                  <c:v>4352</c:v>
                 </c:pt>
                 <c:pt idx="11">
-                  <c:v>3751</c:v>
+                  <c:v>4133</c:v>
                 </c:pt>
                 <c:pt idx="12">
-                  <c:v>3869</c:v>
+                  <c:v>3892</c:v>
                 </c:pt>
                 <c:pt idx="13">
-                  <c:v>3962</c:v>
+                  <c:v>3649</c:v>
                 </c:pt>
                 <c:pt idx="14">
-                  <c:v>4029</c:v>
+                  <c:v>3406</c:v>
                 </c:pt>
                 <c:pt idx="15">
-                  <c:v>4070</c:v>
+                  <c:v>3164</c:v>
                 </c:pt>
                 <c:pt idx="16">
-                  <c:v>4086</c:v>
+                  <c:v>2921</c:v>
                 </c:pt>
                 <c:pt idx="17">
-                  <c:v>4073</c:v>
+                  <c:v>2678</c:v>
                 </c:pt>
                 <c:pt idx="18">
-                  <c:v>4031</c:v>
+                  <c:v>2435</c:v>
                 </c:pt>
                 <c:pt idx="19">
-                  <c:v>3960</c:v>
+                  <c:v>2193</c:v>
                 </c:pt>
                 <c:pt idx="20">
-                  <c:v>3863</c:v>
+                  <c:v>1950</c:v>
                 </c:pt>
                 <c:pt idx="21">
-                  <c:v>3740</c:v>
+                  <c:v>1707</c:v>
                 </c:pt>
                 <c:pt idx="22">
-                  <c:v>3594</c:v>
+                  <c:v>1465</c:v>
                 </c:pt>
                 <c:pt idx="23">
-                  <c:v>3424</c:v>
+                  <c:v>1222</c:v>
                 </c:pt>
                 <c:pt idx="24">
-                  <c:v>3233</c:v>
+                  <c:v>979</c:v>
                 </c:pt>
                 <c:pt idx="25">
-                  <c:v>3028</c:v>
+                  <c:v>737</c:v>
                 </c:pt>
                 <c:pt idx="26">
-                  <c:v>2824</c:v>
+                  <c:v>514</c:v>
                 </c:pt>
                 <c:pt idx="27">
-                  <c:v>2620</c:v>
+                  <c:v>333</c:v>
                 </c:pt>
                 <c:pt idx="28">
-                  <c:v>2415</c:v>
+                  <c:v>197</c:v>
                 </c:pt>
                 <c:pt idx="29">
-                  <c:v>2211</c:v>
+                  <c:v>94</c:v>
                 </c:pt>
                 <c:pt idx="30">
-                  <c:v>2007</c:v>
+                  <c:v>24</c:v>
                 </c:pt>
                 <c:pt idx="31">
-                  <c:v>1803</c:v>
+                  <c:v>1</c:v>
                 </c:pt>
                 <c:pt idx="32">
-                  <c:v>1598</c:v>
+                  <c:v>0</c:v>
                 </c:pt>
                 <c:pt idx="33">
-                  <c:v>1394</c:v>
+                  <c:v>0</c:v>
                 </c:pt>
                 <c:pt idx="34">
-                  <c:v>1190</c:v>
+                  <c:v>0</c:v>
                 </c:pt>
                 <c:pt idx="35">
-                  <c:v>985</c:v>
+                  <c:v>0</c:v>
                 </c:pt>
                 <c:pt idx="36">
-                  <c:v>781</c:v>
+                  <c:v>0</c:v>
                 </c:pt>
                 <c:pt idx="37">
-                  <c:v>589</c:v>
+                  <c:v>0</c:v>
                 </c:pt>
                 <c:pt idx="38">
-                  <c:v>427</c:v>
+                  <c:v>0</c:v>
                 </c:pt>
                 <c:pt idx="39">
-                  <c:v>294</c:v>
+                  <c:v>0</c:v>
                 </c:pt>
                 <c:pt idx="40">
-                  <c:v>187</c:v>
+                  <c:v>0</c:v>
                 </c:pt>
                 <c:pt idx="41">
-                  <c:v>105</c:v>
+                  <c:v>0</c:v>
                 </c:pt>
                 <c:pt idx="42">
-                  <c:v>47</c:v>
+                  <c:v>0</c:v>
                 </c:pt>
                 <c:pt idx="43">
-                  <c:v>13</c:v>
+                  <c:v>0</c:v>
                 </c:pt>
                 <c:pt idx="44">
                   <c:v>0</c:v>
@@ -2376,136 +2376,136 @@
                 <c:formatCode>General</c:formatCode>
                 <c:ptCount val="120"/>
                 <c:pt idx="0">
-                  <c:v>561</c:v>
+                  <c:v>1806</c:v>
                 </c:pt>
                 <c:pt idx="1">
-                  <c:v>1030</c:v>
+                  <c:v>3395</c:v>
                 </c:pt>
                 <c:pt idx="2">
-                  <c:v>1449</c:v>
+                  <c:v>4718</c:v>
                 </c:pt>
                 <c:pt idx="3">
-                  <c:v>1838</c:v>
+                  <c:v>4790</c:v>
                 </c:pt>
                 <c:pt idx="4">
-                  <c:v>2187</c:v>
+                  <c:v>4836</c:v>
                 </c:pt>
                 <c:pt idx="5">
-                  <c:v>2501</c:v>
+                  <c:v>4837</c:v>
                 </c:pt>
                 <c:pt idx="6">
-                  <c:v>2781</c:v>
+                  <c:v>4832</c:v>
                 </c:pt>
                 <c:pt idx="7">
-                  <c:v>3030</c:v>
+                  <c:v>4759</c:v>
                 </c:pt>
                 <c:pt idx="8">
-                  <c:v>3250</c:v>
+                  <c:v>4651</c:v>
                 </c:pt>
                 <c:pt idx="9">
-                  <c:v>3442</c:v>
+                  <c:v>4511</c:v>
                 </c:pt>
                 <c:pt idx="10">
-                  <c:v>3609</c:v>
+                  <c:v>4352</c:v>
                 </c:pt>
                 <c:pt idx="11">
-                  <c:v>3751</c:v>
+                  <c:v>4133</c:v>
                 </c:pt>
                 <c:pt idx="12">
-                  <c:v>3869</c:v>
+                  <c:v>3892</c:v>
                 </c:pt>
                 <c:pt idx="13">
-                  <c:v>3962</c:v>
+                  <c:v>3649</c:v>
                 </c:pt>
                 <c:pt idx="14">
-                  <c:v>4029</c:v>
+                  <c:v>3406</c:v>
                 </c:pt>
                 <c:pt idx="15">
-                  <c:v>4070</c:v>
+                  <c:v>3164</c:v>
                 </c:pt>
                 <c:pt idx="16">
-                  <c:v>4086</c:v>
+                  <c:v>2921</c:v>
                 </c:pt>
                 <c:pt idx="17">
-                  <c:v>4073</c:v>
+                  <c:v>2678</c:v>
                 </c:pt>
                 <c:pt idx="18">
-                  <c:v>4031</c:v>
+                  <c:v>2435</c:v>
                 </c:pt>
                 <c:pt idx="19">
-                  <c:v>3960</c:v>
+                  <c:v>2193</c:v>
                 </c:pt>
                 <c:pt idx="20">
-                  <c:v>3863</c:v>
+                  <c:v>1950</c:v>
                 </c:pt>
                 <c:pt idx="21">
-                  <c:v>3740</c:v>
+                  <c:v>1707</c:v>
                 </c:pt>
                 <c:pt idx="22">
-                  <c:v>3594</c:v>
+                  <c:v>1465</c:v>
                 </c:pt>
                 <c:pt idx="23">
-                  <c:v>3424</c:v>
+                  <c:v>1222</c:v>
                 </c:pt>
                 <c:pt idx="24">
-                  <c:v>3233</c:v>
+                  <c:v>979</c:v>
                 </c:pt>
                 <c:pt idx="25">
-                  <c:v>3028</c:v>
+                  <c:v>737</c:v>
                 </c:pt>
                 <c:pt idx="26">
-                  <c:v>2824</c:v>
+                  <c:v>514</c:v>
                 </c:pt>
                 <c:pt idx="27">
-                  <c:v>2620</c:v>
+                  <c:v>333</c:v>
                 </c:pt>
                 <c:pt idx="28">
-                  <c:v>2415</c:v>
+                  <c:v>197</c:v>
                 </c:pt>
                 <c:pt idx="29">
-                  <c:v>2211</c:v>
+                  <c:v>94</c:v>
                 </c:pt>
                 <c:pt idx="30">
-                  <c:v>2007</c:v>
+                  <c:v>24</c:v>
                 </c:pt>
                 <c:pt idx="31">
-                  <c:v>1803</c:v>
+                  <c:v>1</c:v>
                 </c:pt>
                 <c:pt idx="32">
-                  <c:v>1598</c:v>
+                  <c:v>0</c:v>
                 </c:pt>
                 <c:pt idx="33">
-                  <c:v>1394</c:v>
+                  <c:v>0</c:v>
                 </c:pt>
                 <c:pt idx="34">
-                  <c:v>1190</c:v>
+                  <c:v>0</c:v>
                 </c:pt>
                 <c:pt idx="35">
-                  <c:v>985</c:v>
+                  <c:v>0</c:v>
                 </c:pt>
                 <c:pt idx="36">
-                  <c:v>781</c:v>
+                  <c:v>0</c:v>
                 </c:pt>
                 <c:pt idx="37">
-                  <c:v>589</c:v>
+                  <c:v>0</c:v>
                 </c:pt>
                 <c:pt idx="38">
-                  <c:v>427</c:v>
+                  <c:v>0</c:v>
                 </c:pt>
                 <c:pt idx="39">
-                  <c:v>294</c:v>
+                  <c:v>0</c:v>
                 </c:pt>
                 <c:pt idx="40">
-                  <c:v>187</c:v>
+                  <c:v>0</c:v>
                 </c:pt>
                 <c:pt idx="41">
-                  <c:v>105</c:v>
+                  <c:v>0</c:v>
                 </c:pt>
                 <c:pt idx="42">
-                  <c:v>47</c:v>
+                  <c:v>0</c:v>
                 </c:pt>
                 <c:pt idx="43">
-                  <c:v>13</c:v>
+                  <c:v>0</c:v>
                 </c:pt>
                 <c:pt idx="44">
                   <c:v>0</c:v>
@@ -2977,13 +2977,13 @@
                 <c:ptCount val="3"/>
                 <c:lvl>
                   <c:pt idx="0">
-                    <c:v>Before shares</c:v>
+                    <c:v>Shares, no land fee</c:v>
                   </c:pt>
                   <c:pt idx="1">
-                    <c:v>With shares</c:v>
+                    <c:v>Shares, land fee</c:v>
                   </c:pt>
                   <c:pt idx="2">
-                    <c:v>With co-ops</c:v>
+                    <c:v>Co-ops</c:v>
                   </c:pt>
                 </c:lvl>
               </c:multiLvlStrCache>
@@ -2996,13 +2996,13 @@
                 <c:formatCode>General</c:formatCode>
                 <c:ptCount val="3"/>
                 <c:pt idx="0">
-                  <c:v>169</c:v>
+                  <c:v>496</c:v>
                 </c:pt>
                 <c:pt idx="1">
-                  <c:v>216</c:v>
+                  <c:v>570</c:v>
                 </c:pt>
                 <c:pt idx="2">
-                  <c:v>187</c:v>
+                  <c:v>468</c:v>
                 </c:pt>
               </c:numCache>
             </c:numRef>
@@ -3060,13 +3060,13 @@
                 <c:ptCount val="3"/>
                 <c:lvl>
                   <c:pt idx="0">
-                    <c:v>Before shares</c:v>
+                    <c:v>Shares, no land fee</c:v>
                   </c:pt>
                   <c:pt idx="1">
-                    <c:v>With shares</c:v>
+                    <c:v>Shares, land fee</c:v>
                   </c:pt>
                   <c:pt idx="2">
-                    <c:v>With co-ops</c:v>
+                    <c:v>Co-ops</c:v>
                   </c:pt>
                 </c:lvl>
               </c:multiLvlStrCache>
@@ -3079,13 +3079,13 @@
                 <c:formatCode>General</c:formatCode>
                 <c:ptCount val="3"/>
                 <c:pt idx="0">
-                  <c:v>23</c:v>
+                  <c:v>9997</c:v>
                 </c:pt>
                 <c:pt idx="1">
-                  <c:v>78</c:v>
+                  <c:v>242</c:v>
                 </c:pt>
                 <c:pt idx="2">
-                  <c:v>63</c:v>
+                  <c:v>166</c:v>
                 </c:pt>
               </c:numCache>
             </c:numRef>
@@ -3708,7 +3708,7 @@
           <a:p>
             <a:r>
               <a:rPr lang="en-US" dirty="0"/>
-              <a:t>Ten years, ten runs, twelve rungs. What it takes to survive: in the debt village, a government willing to be permanently in debt. In the SuMSy village, an income everyone gets and a fee on idle money that pays for the state — and a fee on land, or the rich end up owning the fields. In both: prices that respond, and taxes that stay off bread — the one tax that killed the village was the tax on bread. And the open questions I can't answer yet: how big a public sector can each money afford (*), and what happens in the ten years when you switch from one money to the other. That's the next simulation.</a:t>
+              <a:t>Ten years, ten runs, twelve rungs. What it takes to survive: in the debt village, a government willing to be permanently in debt, and a third of the village without work at every step. In the SuMSy village, an income everyone gets, a fee on idle money that pays for the state, a fee on land paid out as a dividend — and a labour market that shares the work, or the income alone leaves people behind. In both: taxes that stay off bread — the one tax that killed the village was the tax on bread. And the open question I can't answer yet: what happens in the ten years when you switch from one money to the other. That's the next simulation.</a:t>
             </a:r>
             <a:endParaRPr lang="en-US" dirty="0"/>
           </a:p>
@@ -4148,7 +4148,7 @@
           <a:p>
             <a:r>
               <a:rPr lang="en-US" dirty="0"/>
-              <a:t>Add a government: public jobs and a bread allowance for the unemployed. Now everyone lives — and the government borrows about three quarters of what it spends, every month, for ten years. I tried every tax the village could bear. Balance the books, and fourteen people are left. The debt village lives *because* its government goes into debt. And it can never get out: in that village, every coin in circulation is someone's debt.</a:t>
+              <a:t>Add a government: public jobs and a bread allowance for the unemployed. Now almost everyone lives — and the government borrows half of what it spends, every month, for ten years, and never repays. Balance the books by taxing, and two hundred of five hundred and twelve are left. The debt village lives *because* its government goes into debt. And it can never get out: in that village, every coin in circulation is someone's debt.</a:t>
             </a:r>
             <a:endParaRPr lang="en-US" dirty="0"/>
           </a:p>
@@ -4236,7 +4236,7 @@
           <a:p>
             <a:r>
               <a:rPr lang="en-US" dirty="0"/>
-              <a:t>It does — once. While the new money is still filling up the village, the parking fee brings in little, and the SuMSy government borrows its citizens' savings: about two months of guaranteed income per villager. Then it pays every unit back, in every run (*). A startup cost. One village repays; the other cannot.</a:t>
+              <a:t>It does — once. While the new money is still filling up the village, the parking tax brings in little, and the SuMSy government borrows its citizens' savings: about a month of guaranteed income per villager, at its worst in month six. Then it pays every unit back, by month thirty-three, in every run. A startup cost. One village repays; the other cannot. And from that step on, nobody in the SuMSy village is out of work — not one person, in ten years, in any run.</a:t>
             </a:r>
             <a:endParaRPr lang="en-US" dirty="0"/>
           </a:p>
@@ -4412,7 +4412,7 @@
           <a:p>
             <a:r>
               <a:rPr lang="en-US" dirty="0"/>
-              <a:t>Land. In the debt village land sells for about four years of rent. In the SuMSy village, nobody sells — because money melts and land doesn't, so land becomes the thing to hold, and the rare sale goes for a fortune. Silvio Gesell saw this a century ago. The fix is a fee on land, paid out to everyone as a dividend: then land trades again, at the debt village's price, and the gap between rich and poor is the smallest of all three (*).</a:t>
+              <a:t>Land. In the debt village a plot sells for thirty years of rent. In the SuMSy village, nobody sells — because money melts and land doesn't, so land becomes the thing to hold, and the rare sale goes for a fortune: seven hundred years of rent. Silvio Gesell saw this a century ago. The fix is a fee on land, paid out to everyone as a dividend: then land trades again, at four years of rent, the dividend is larger than the income itself, and the poorest tenth of the village hold sixteen meals instead of one.</a:t>
             </a:r>
             <a:endParaRPr lang="en-US" dirty="0"/>
           </a:p>
@@ -4500,7 +4500,7 @@
           <a:p>
             <a:r>
               <a:rPr lang="en-US" dirty="0"/>
-              <a:t>Then I did something unkind: I made everyone greedy. Spend every surplus, ten loaves at a time, forever. The SuMSy bakeries go bankrupt — and someone reopens one — again, and again, fifty times in ten years (*). And everyone still eats. What it took was two things: prices that move when bread runs short, and a village that starts a new bakery when the last one falls. Money didn't save them. Rules did.</a:t>
+              <a:t>Then I did something unkind: I made everyone greedy. Spend every surplus, ten loaves at a time, forever. The SuMSy village dies — in every run of ten, by year seven on average. Greedy buyers bid land to six times its price in the first month, and the village's money ends in the hands of those who hold it. The debt village under the same greed keeps two hundred and fifty-five. Greed in a quarter of the village the SuMSy village survives; greed in all of it, it does not. Money didn't save them. Nothing did. That is what a stress test is for.</a:t>
             </a:r>
             <a:endParaRPr lang="en-US" dirty="0"/>
           </a:p>
@@ -6646,7 +6646,7 @@
                 <a:ea typeface="Cambria" pitchFamily="34" charset="-122"/>
                 <a:cs typeface="Cambria" pitchFamily="34" charset="-120"/>
               </a:rPr>
-              <a:t>14</a:t>
+              <a:t>150</a:t>
             </a:r>
             <a:endParaRPr lang="en-US" sz="6000" dirty="0"/>
           </a:p>
@@ -6685,7 +6685,7 @@
                 <a:ea typeface="Cambria" pitchFamily="34" charset="-122"/>
                 <a:cs typeface="Cambria" pitchFamily="34" charset="-120"/>
               </a:rPr>
-              <a:t>510</a:t>
+              <a:t>458</a:t>
             </a:r>
             <a:endParaRPr lang="en-US" sz="6000" dirty="0"/>
           </a:p>
@@ -6850,7 +6850,7 @@
                 <a:ea typeface="Cambria" pitchFamily="34" charset="-122"/>
                 <a:cs typeface="Cambria" pitchFamily="34" charset="-120"/>
               </a:rPr>
-              <a:t>191k</a:t>
+              <a:t>200k</a:t>
             </a:r>
             <a:endParaRPr lang="en-US" sz="5400" dirty="0"/>
           </a:p>
@@ -7203,7 +7203,7 @@
                 <a:ea typeface="Cambria" pitchFamily="34" charset="-122"/>
                 <a:cs typeface="Cambria" pitchFamily="34" charset="-120"/>
               </a:rPr>
-              <a:t>Shares widen the gap</a:t>
+              <a:t>Shares, land, co-ops</a:t>
             </a:r>
             <a:endParaRPr lang="en-US" sz="3600" dirty="0"/>
           </a:p>

--- a/docs/talk/deck/what_it_takes_to_survive.pptx
+++ b/docs/talk/deck/what_it_takes_to_survive.pptx
@@ -4500,7 +4500,7 @@
           <a:p>
             <a:r>
               <a:rPr lang="en-US" dirty="0"/>
-              <a:t>Then I did something unkind: I made everyone greedy. Spend every surplus, ten loaves at a time, forever. The SuMSy village dies — in every run of ten, by year seven on average. Greedy buyers bid land to six times its price in the first month, and the village's money ends in the hands of those who hold it. The debt village under the same greed keeps two hundred and fifty-five. Greed in a quarter of the village the SuMSy village survives; greed in all of it, it does not. Money didn't save them. Nothing did. That is what a stress test is for.</a:t>
+              <a:t>Then I did something unkind: I made everyone greedy. Spend every surplus, forever. The SuMSy village dies — fifty-seven left on average, nobody in the worst run. Not through land this time: through bread. Everyone has money to spare, so the bread sells out; the bakeries bid for more grain than the land can grow; grain doubles, then doubles again; the bakeries' prices chase it at forty percent a year and never catch it; their bills go unpaid, and they are wound up one by one until the last one's closing starves the village. No rule saves it: let prices rise faster and it dies faster. The debt village under the same greed keeps five hundred and ten — its greedy have no spare money, and its prices stop where their money does. That is what a stress test is for: a village where everyone can always pay has nothing to ration bread with but hunger.</a:t>
             </a:r>
             <a:endParaRPr lang="en-US" dirty="0"/>
           </a:p>

--- a/docs/talk/deck/what_it_takes_to_survive.pptx
+++ b/docs/talk/deck/what_it_takes_to_survive.pptx
@@ -4500,7 +4500,7 @@
           <a:p>
             <a:r>
               <a:rPr lang="en-US" dirty="0"/>
-              <a:t>Then I did something unkind: I made everyone greedy. Spend every surplus, forever. The SuMSy village dies — fifty-seven left on average, nobody in the worst run. Not through land this time: through bread. Everyone has money to spare, so the bread sells out; the bakeries bid for more grain than the land can grow; grain doubles, then doubles again; the bakeries' prices chase it at forty percent a year and never catch it; their bills go unpaid, and they are wound up one by one until the last one's closing starves the village. No rule saves it: let prices rise faster and it dies faster. The debt village under the same greed keeps five hundred and ten — its greedy have no spare money, and its prices stop where their money does. That is what a stress test is for: a village where everyone can always pay has nothing to ration bread with but hunger.</a:t>
+              <a:t>Then I did something unkind: I made everyone greedy. Spend every surplus, forever. The first time I ran it, the SuMSy village died — every run, every villager. It took three days to find out why, and it wasn't greed. The bakers planned on what their customers could afford instead of what they bought, and in a village where everyone has money, that meant buying three times the grain their ovens could bake. They went bankrupt with full storerooms while bread got cheaper. Fix the bakers' arithmetic and the greedy village feeds everyone, has the smallest gap of any village I built, and owes nothing. The debt village under the same greed lives too — on two hundred and thirty thousand of debt. The one thing that kills them both is panic: buyers who will pay double. No money survives that.</a:t>
             </a:r>
             <a:endParaRPr lang="en-US" dirty="0"/>
           </a:p>
@@ -6646,7 +6646,7 @@
                 <a:ea typeface="Cambria" pitchFamily="34" charset="-122"/>
                 <a:cs typeface="Cambria" pitchFamily="34" charset="-120"/>
               </a:rPr>
-              <a:t>150</a:t>
+              <a:t>158</a:t>
             </a:r>
             <a:endParaRPr lang="en-US" sz="6000" dirty="0"/>
           </a:p>

--- a/docs/talk/deck/what_it_takes_to_survive.pptx
+++ b/docs/talk/deck/what_it_takes_to_survive.pptx
@@ -3708,7 +3708,7 @@
           <a:p>
             <a:r>
               <a:rPr lang="en-US" dirty="0"/>
-              <a:t>Ten years, ten runs, twelve rungs. What it takes to survive: in the debt village, a government willing to be permanently in debt, and a third of the village without work at every step. In the SuMSy village, an income everyone gets, a fee on idle money that pays for the state, a fee on land paid out as a dividend — and a labour market that shares the work, or the income alone leaves people behind. In both: taxes that stay off bread — the one tax that killed the village was the tax on bread. And the open question I can't answer yet: what happens in the ten years when you switch from one money to the other. That's the next simulation.</a:t>
+              <a:t>Ten years, ten runs, twelve rungs. What it takes to survive: in the debt village, a government willing to be permanently in debt, and a third of the village without work at every step. In the SuMSy village, an income everyone gets, a fee on idle money that pays for the state, a fee on land paid out as a dividend — and a labour market that shares the work, or the income alone leaves people behind. And a friend asked the question every banker will ask: give the debt village the same income and the same land dividend, and does it do as well? It does — everyone alive, nobody out of work — and it borrows three hundred and fifty thousand to do it. The income and the dividend keep a village alive in either money. What SuMSy adds is that nobody has to borrow them. In both: taxes that stay off bread — the one tax that killed the village was the tax on bread. And the open question I can't answer yet: what happens in the ten years when you switch from one money to the other. That's the next simulation.</a:t>
             </a:r>
             <a:endParaRPr lang="en-US" dirty="0"/>
           </a:p>
@@ -4412,7 +4412,7 @@
           <a:p>
             <a:r>
               <a:rPr lang="en-US" dirty="0"/>
-              <a:t>Land. In the debt village a plot sells for thirty years of rent. In the SuMSy village, nobody sells — because money melts and land doesn't, so land becomes the thing to hold, and the rare sale goes for a fortune: seven hundred years of rent. Silvio Gesell saw this a century ago. The fix is a fee on land, paid out to everyone as a dividend: then land trades again, at four years of rent, the dividend is larger than the income itself, and the poorest tenth of the village hold sixteen meals instead of one.</a:t>
+              <a:t>Land. In the debt village a plot sells for thirty years of rent. In the SuMSy village, nobody sells — because money melts and land doesn't, so land becomes the thing to hold, and the rare sale goes for a fortune: seven hundred years of rent. Silvio Gesell saw this a century ago; his answer was for the state to buy the land out. Henry George's answer was a tax on land, and that's what the village tries: a fee on land, paid out to everyone as a dividend: then land trades again, at four years of rent, the dividend is larger than the income itself, and the poorest tenth of the village hold sixteen meals instead of one.</a:t>
             </a:r>
             <a:endParaRPr lang="en-US" dirty="0"/>
           </a:p>
